--- a/presentation/kosmo-nizni_klodiki_148_live.pptx
+++ b/presentation/kosmo-nizni_klodiki_148_live.pptx
@@ -3449,7 +3449,7 @@
                 <a:ea typeface="Arial" pitchFamily="34" charset="-122"/>
                 <a:cs typeface="Arial" pitchFamily="34" charset="-120"/>
               </a:rPr>
-              <a:t>Команда kosmo-nizni_klodiki_148   ·   gitverse.ru/hackrus.experts/kosmo-nizni_klodiki_148</a:t>
+              <a:t>КосмоХакатон 2026 · команда Клодики   ·   gitverse.ru/hackrus.experts/kosmo-nizni_klodiki_148</a:t>
             </a:r>
             <a:endParaRPr lang="en-US" sz="1050" dirty="0"/>
           </a:p>
@@ -4223,7 +4223,7 @@
                 <a:ea typeface="Arial" pitchFamily="34" charset="-122"/>
                 <a:cs typeface="Arial" pitchFamily="34" charset="-120"/>
               </a:rPr>
-              <a:t>Команда kosmo-nizni_klodiki_148   ·   gitverse.ru/hackrus.experts/kosmo-nizni_klodiki_148</a:t>
+              <a:t>КосмоХакатон 2026 · команда Клодики   ·   gitverse.ru/hackrus.experts/kosmo-nizni_klodiki_148</a:t>
             </a:r>
             <a:endParaRPr lang="en-US" sz="1050" dirty="0"/>
           </a:p>
@@ -4748,7 +4748,7 @@
                 <a:ea typeface="Arial" pitchFamily="34" charset="-122"/>
                 <a:cs typeface="Arial" pitchFamily="34" charset="-120"/>
               </a:rPr>
-              <a:t>движок принимает произвольную структуру сценария; проверен на синтетике с другой геометрией</a:t>
+              <a:t>движок не хардкодит ID и координаты и работает со сценариями схемы cosmo-A-1.0</a:t>
             </a:r>
             <a:endParaRPr lang="en-US" sz="1200" dirty="0"/>
           </a:p>
@@ -4787,7 +4787,7 @@
                 <a:ea typeface="Arial" pitchFamily="34" charset="-122"/>
                 <a:cs typeface="Arial" pitchFamily="34" charset="-120"/>
               </a:rPr>
-              <a:t>официальная модель воспроизводима: регрессионные тесты не дают тихо изменить расчет   ·   Команда kosmo-nizni_klodiki_148   ·   gitverse.ru/hackrus.experts/kosmo-nizni_klodiki_148</a:t>
+              <a:t>официальная модель воспроизводима: регрессионные тесты не дают тихо изменить расчет   ·   КосмоХакатон 2026 · команда Клодики   ·   gitverse.ru/hackrus.experts/kosmo-nizni_klodiki_148</a:t>
             </a:r>
             <a:endParaRPr lang="en-US" sz="1050" dirty="0"/>
           </a:p>
@@ -4984,6 +4984,23 @@
               </a:rPr>
               <a:t>клиент → спутник → межспутниковая сеть → шлюз</a:t>
             </a:r>
+            <a:pPr indent="0" marL="0">
+              <a:spcAft>
+                <a:spcPts val="400"/>
+              </a:spcAft>
+              <a:buNone/>
+            </a:pPr>
+            <a:r>
+              <a:rPr lang="en-US" sz="1700" dirty="0">
+                <a:solidFill>
+                  <a:srgbClr val="9AA3C7"/>
+                </a:solidFill>
+                <a:latin typeface="Arial" pitchFamily="34" charset="0"/>
+                <a:ea typeface="Arial" pitchFamily="34" charset="-122"/>
+                <a:cs typeface="Arial" pitchFamily="34" charset="-120"/>
+              </a:rPr>
+              <a:t>Например, при ISL 2000 км клиент видит спутник почти все сутки, но сквозной маршрут существует лишь 62,22% времени.</a:t>
+            </a:r>
             <a:endParaRPr lang="en-US" sz="1700" dirty="0"/>
           </a:p>
         </p:txBody>
@@ -5390,7 +5407,7 @@
                 <a:ea typeface="Arial" pitchFamily="34" charset="-122"/>
                 <a:cs typeface="Arial" pitchFamily="34" charset="-120"/>
               </a:rPr>
-              <a:t>видимость спутника — необходимое, но не достаточное условие связи   ·   Команда kosmo-nizni_klodiki_148   ·   gitverse.ru/hackrus.experts/kosmo-nizni_klodiki_148</a:t>
+              <a:t>видимость спутника — необходимое, но не достаточное условие связи   ·   КосмоХакатон 2026 · команда Клодики   ·   gitverse.ru/hackrus.experts/kosmo-nizni_klodiki_148</a:t>
             </a:r>
             <a:endParaRPr lang="en-US" sz="1050" dirty="0"/>
           </a:p>
@@ -5542,7 +5559,7 @@
                 <a:ea typeface="Arial" pitchFamily="34" charset="-122"/>
                 <a:cs typeface="Arial" pitchFamily="34" charset="-120"/>
               </a:rPr>
-              <a:t>видеозапись работы — 20 секунд, всё видно</a:t>
+              <a:t>видеозапись работы сервиса — 37 секунд, всё видно</a:t>
             </a:r>
             <a:endParaRPr lang="en-US" sz="1250" dirty="0"/>
           </a:p>
@@ -7363,7 +7380,7 @@
                 <a:ea typeface="Arial" pitchFamily="34" charset="-122"/>
                 <a:cs typeface="Arial" pitchFamily="34" charset="-120"/>
               </a:rPr>
-              <a:t>официальный geometry.py · 720 отсчетов · стратегия «минимум длины» · числа зафиксированы регрессионными тестами   ·   Команда kosmo-nizni_klodiki_148   ·   gitverse.ru/hackrus.experts/kosmo-nizni_klodiki_148</a:t>
+              <a:t>официальный geometry.py · 720 отсчетов · стратегия «минимум длины» · числа зафиксированы регрессионными тестами   ·   КосмоХакатон 2026 · команда Клодики   ·   gitverse.ru/hackrus.experts/kosmo-nizni_klodiki_148</a:t>
             </a:r>
             <a:endParaRPr lang="en-US" sz="1050" dirty="0"/>
           </a:p>
@@ -7476,7 +7493,7 @@
                 <a:ea typeface="Arial" pitchFamily="34" charset="-122"/>
                 <a:cs typeface="Arial" pitchFamily="34" charset="-120"/>
               </a:rPr>
-              <a:t>Требование «ISL не менее 3000 км»</a:t>
+              <a:t>3000 км дают запас: целевой уровень держится</a:t>
             </a:r>
             <a:endParaRPr lang="en-US" sz="3200" dirty="0"/>
           </a:p>
@@ -7496,7 +7513,7 @@
                 <a:ea typeface="Arial" pitchFamily="34" charset="-122"/>
                 <a:cs typeface="Arial" pitchFamily="34" charset="-120"/>
               </a:rPr>
-              <a:t>было избыточным</a:t>
+              <a:t>примерно с 2725 км</a:t>
             </a:r>
             <a:endParaRPr lang="en-US" sz="3200" dirty="0"/>
           </a:p>
@@ -7527,7 +7544,7 @@
               <a:buNone/>
             </a:pPr>
             <a:r>
-              <a:rPr lang="en-US" sz="7200" b="1" dirty="0">
+              <a:rPr lang="en-US" sz="6000" b="1" dirty="0">
                 <a:solidFill>
                   <a:srgbClr val="9BA3F5"/>
                 </a:solidFill>
@@ -7535,9 +7552,9 @@
                 <a:ea typeface="Arial" pitchFamily="34" charset="-122"/>
                 <a:cs typeface="Arial" pitchFamily="34" charset="-120"/>
               </a:rPr>
-              <a:t>2725</a:t>
-            </a:r>
-            <a:endParaRPr lang="en-US" sz="7200" dirty="0"/>
+              <a:t>~275 км</a:t>
+            </a:r>
+            <a:endParaRPr lang="en-US" sz="6000" dirty="0"/>
           </a:p>
         </p:txBody>
       </p:sp>
@@ -7577,7 +7594,7 @@
                 <a:ea typeface="Arial" pitchFamily="34" charset="-122"/>
                 <a:cs typeface="Arial" pitchFamily="34" charset="-120"/>
               </a:rPr>
-              <a:t>км — порог, выше которого</a:t>
+              <a:t>запаса штатных 3000 км</a:t>
             </a:r>
             <a:endParaRPr lang="en-US" sz="1300" dirty="0"/>
           </a:p>
@@ -7597,7 +7614,7 @@
                 <a:ea typeface="Arial" pitchFamily="34" charset="-122"/>
                 <a:cs typeface="Arial" pitchFamily="34" charset="-120"/>
               </a:rPr>
-              <a:t>доступность не растет</a:t>
+              <a:t>относительно найденной границы</a:t>
             </a:r>
             <a:endParaRPr lang="en-US" sz="1300" dirty="0"/>
           </a:p>
@@ -7611,24 +7628,24 @@
         </p:nvSpPr>
         <p:spPr>
           <a:xfrm>
-            <a:off x="640080" y="4709160"/>
-            <a:ext cx="4023360" cy="640080"/>
-          </a:xfrm>
-          <a:prstGeom prst="rect">
-            <a:avLst/>
-          </a:prstGeom>
-          <a:noFill/>
-          <a:ln/>
-        </p:spPr>
-        <p:txBody>
-          <a:bodyPr wrap="square" lIns="0" tIns="0" rIns="0" bIns="0" rtlCol="0" anchor="ctr"/>
-          <a:lstStyle/>
-          <a:p>
-            <a:pPr indent="0" marL="0">
-              <a:buNone/>
-            </a:pPr>
-            <a:r>
-              <a:rPr lang="en-US" sz="1300" dirty="0">
+            <a:off x="640080" y="4617720"/>
+            <a:ext cx="4114800" cy="1188720"/>
+          </a:xfrm>
+          <a:prstGeom prst="rect">
+            <a:avLst/>
+          </a:prstGeom>
+          <a:noFill/>
+          <a:ln/>
+        </p:spPr>
+        <p:txBody>
+          <a:bodyPr wrap="square" lIns="0" tIns="0" rIns="0" bIns="0" rtlCol="0" anchor="ctr"/>
+          <a:lstStyle/>
+          <a:p>
+            <a:pPr indent="0" marL="0">
+              <a:buNone/>
+            </a:pPr>
+            <a:r>
+              <a:rPr lang="en-US" sz="1200" dirty="0">
                 <a:solidFill>
                   <a:srgbClr val="9AA3C7"/>
                 </a:solidFill>
@@ -7636,88 +7653,15 @@
                 <a:ea typeface="Arial" pitchFamily="34" charset="-122"/>
                 <a:cs typeface="Arial" pitchFamily="34" charset="-120"/>
               </a:rPr>
-              <a:t>проверено с шагом 25 км</a:t>
-            </a:r>
-            <a:endParaRPr lang="en-US" sz="1300" dirty="0"/>
-          </a:p>
-          <a:p>
-            <a:pPr indent="0" marL="0">
-              <a:buNone/>
-            </a:pPr>
-            <a:r>
-              <a:rPr lang="en-US" sz="1300" dirty="0">
-                <a:solidFill>
-                  <a:srgbClr val="9AA3C7"/>
-                </a:solidFill>
-                <a:latin typeface="Arial" pitchFamily="34" charset="0"/>
-                <a:ea typeface="Arial" pitchFamily="34" charset="-122"/>
-                <a:cs typeface="Arial" pitchFamily="34" charset="-120"/>
-              </a:rPr>
-              <a:t>в диапазоне 2000–3000 км</a:t>
-            </a:r>
-            <a:endParaRPr lang="en-US" sz="1300" dirty="0"/>
-          </a:p>
-        </p:txBody>
-      </p:sp>
-      <p:sp>
-        <p:nvSpPr>
-          <p:cNvPr id="7" name="Text 5"/>
-          <p:cNvSpPr/>
-          <p:nvPr/>
-        </p:nvSpPr>
-        <p:spPr>
-          <a:xfrm>
-            <a:off x="640080" y="5440680"/>
-            <a:ext cx="4023360" cy="640080"/>
-          </a:xfrm>
-          <a:prstGeom prst="rect">
-            <a:avLst/>
-          </a:prstGeom>
-          <a:noFill/>
-          <a:ln/>
-        </p:spPr>
-        <p:txBody>
-          <a:bodyPr wrap="square" lIns="0" tIns="0" rIns="0" bIns="0" rtlCol="0" anchor="ctr"/>
-          <a:lstStyle/>
-          <a:p>
-            <a:pPr indent="0" marL="0">
-              <a:buNone/>
-            </a:pPr>
-            <a:r>
-              <a:rPr lang="en-US" sz="1300" dirty="0">
-                <a:solidFill>
-                  <a:srgbClr val="F2F4FF"/>
-                </a:solidFill>
-                <a:latin typeface="Arial" pitchFamily="34" charset="0"/>
-                <a:ea typeface="Arial" pitchFamily="34" charset="-122"/>
-                <a:cs typeface="Arial" pitchFamily="34" charset="-120"/>
-              </a:rPr>
-              <a:t>Требование к аппаратуре снижается</a:t>
-            </a:r>
-            <a:endParaRPr lang="en-US" sz="1300" dirty="0"/>
-          </a:p>
-          <a:p>
-            <a:pPr indent="0" marL="0">
-              <a:buNone/>
-            </a:pPr>
-            <a:r>
-              <a:rPr lang="en-US" sz="1300" dirty="0">
-                <a:solidFill>
-                  <a:srgbClr val="F2F4FF"/>
-                </a:solidFill>
-                <a:latin typeface="Arial" pitchFamily="34" charset="0"/>
-                <a:ea typeface="Arial" pitchFamily="34" charset="-122"/>
-                <a:cs typeface="Arial" pitchFamily="34" charset="-120"/>
-              </a:rPr>
-              <a:t>с инженерным запасом на радиолинию.</a:t>
-            </a:r>
-            <a:endParaRPr lang="en-US" sz="1300" dirty="0"/>
+              <a:t>На суточной сетке базовой полной конфигурации: 2700 км → 85,6%, 2725 км → 96,67%, 3000 км → 96,67%. Не универсальная граница — результат для данной геометрии и горизонта.</a:t>
+            </a:r>
+            <a:endParaRPr lang="en-US" sz="1200" dirty="0"/>
           </a:p>
         </p:txBody>
       </p:sp>
       <p:graphicFrame>
         <p:nvGraphicFramePr>
-          <p:cNvPr id="8" name="Chart 0" descr=""/>
+          <p:cNvPr id="7" name="Chart 0" descr=""/>
           <p:cNvGraphicFramePr/>
           <p:nvPr/>
         </p:nvGraphicFramePr>
@@ -7733,7 +7677,7 @@
       </p:graphicFrame>
       <p:sp>
         <p:nvSpPr>
-          <p:cNvPr id="9" name="Text 6"/>
+          <p:cNvPr id="8" name="Text 5"/>
           <p:cNvSpPr/>
           <p:nvPr/>
         </p:nvSpPr>
@@ -7800,7 +7744,7 @@
       </p:sp>
       <p:sp>
         <p:nvSpPr>
-          <p:cNvPr id="10" name="Text 7"/>
+          <p:cNvPr id="9" name="Text 6"/>
           <p:cNvSpPr/>
           <p:nvPr/>
         </p:nvSpPr>
@@ -7831,7 +7775,7 @@
                 <a:ea typeface="Arial" pitchFamily="34" charset="-122"/>
                 <a:cs typeface="Arial" pitchFamily="34" charset="-120"/>
               </a:rPr>
-              <a:t>тот же официальный расчет: при снижении дальности до 2725 км доступность не меняется — запас требования 275 км   ·   Команда kosmo-nizni_klodiki_148   ·   gitverse.ru/hackrus.experts/kosmo-nizni_klodiki_148</a:t>
+              <a:t>тот же официальный расчет: при снижении дальности до 2725 км доступность не меняется — запас требования 275 км   ·   КосмоХакатон 2026 · команда Клодики   ·   gitverse.ru/hackrus.experts/kosmo-nizni_klodiki_148</a:t>
             </a:r>
             <a:endParaRPr lang="en-US" sz="1050" dirty="0"/>
           </a:p>
@@ -7931,42 +7875,42 @@
           <a:p>
             <a:pPr indent="0" marL="0">
               <a:lnSpc>
-                <a:spcPts val="3540"/>
+                <a:spcPts val="3776"/>
               </a:lnSpc>
               <a:buNone/>
             </a:pPr>
             <a:r>
-              <a:rPr lang="en-US" sz="3000" b="1" dirty="0">
-                <a:solidFill>
-                  <a:srgbClr val="F2F4FF"/>
-                </a:solidFill>
-                <a:latin typeface="Arial" pitchFamily="34" charset="0"/>
-                <a:ea typeface="Arial" pitchFamily="34" charset="-122"/>
-                <a:cs typeface="Arial" pitchFamily="34" charset="-120"/>
-              </a:rPr>
-              <a:t>Загруженный аппарат и критичный</a:t>
-            </a:r>
-            <a:endParaRPr lang="en-US" sz="3000" dirty="0"/>
+              <a:rPr lang="en-US" sz="3200" b="1" dirty="0">
+                <a:solidFill>
+                  <a:srgbClr val="F2F4FF"/>
+                </a:solidFill>
+                <a:latin typeface="Arial" pitchFamily="34" charset="0"/>
+                <a:ea typeface="Arial" pitchFamily="34" charset="-122"/>
+                <a:cs typeface="Arial" pitchFamily="34" charset="-120"/>
+              </a:rPr>
+              <a:t>N-1: любой одиночный отказ</a:t>
+            </a:r>
+            <a:endParaRPr lang="en-US" sz="3200" dirty="0"/>
           </a:p>
           <a:p>
             <a:pPr indent="0" marL="0">
               <a:lnSpc>
-                <a:spcPts val="3540"/>
+                <a:spcPts val="3776"/>
               </a:lnSpc>
               <a:buNone/>
             </a:pPr>
             <a:r>
-              <a:rPr lang="en-US" sz="3000" b="1" dirty="0">
-                <a:solidFill>
-                  <a:srgbClr val="F2F4FF"/>
-                </a:solidFill>
-                <a:latin typeface="Arial" pitchFamily="34" charset="0"/>
-                <a:ea typeface="Arial" pitchFamily="34" charset="-122"/>
-                <a:cs typeface="Arial" pitchFamily="34" charset="-120"/>
-              </a:rPr>
-              <a:t>аппарат — разные аппараты</a:t>
-            </a:r>
-            <a:endParaRPr lang="en-US" sz="3000" dirty="0"/>
+              <a:rPr lang="en-US" sz="3200" b="1" dirty="0">
+                <a:solidFill>
+                  <a:srgbClr val="F2F4FF"/>
+                </a:solidFill>
+                <a:latin typeface="Arial" pitchFamily="34" charset="0"/>
+                <a:ea typeface="Arial" pitchFamily="34" charset="-122"/>
+                <a:cs typeface="Arial" pitchFamily="34" charset="-120"/>
+              </a:rPr>
+              <a:t>сохраняет целевой уровень</a:t>
+            </a:r>
+            <a:endParaRPr lang="en-US" sz="3200" dirty="0"/>
           </a:p>
         </p:txBody>
       </p:sp>
@@ -8003,7 +7947,7 @@
                 <a:ea typeface="Arial" pitchFamily="34" charset="-122"/>
                 <a:cs typeface="Arial" pitchFamily="34" charset="-120"/>
               </a:rPr>
-              <a:t>S44</a:t>
+              <a:t>94,31%</a:t>
             </a:r>
             <a:endParaRPr lang="en-US" sz="5400" dirty="0"/>
           </a:p>
@@ -8045,7 +7989,7 @@
                 <a:ea typeface="Arial" pitchFamily="34" charset="-122"/>
                 <a:cs typeface="Arial" pitchFamily="34" charset="-120"/>
               </a:rPr>
-              <a:t>№1 в ранжировании критичности</a:t>
+              <a:t>худшая минимальная доступность</a:t>
             </a:r>
             <a:endParaRPr lang="en-US" sz="1300" dirty="0"/>
           </a:p>
@@ -8065,7 +8009,7 @@
                 <a:ea typeface="Arial" pitchFamily="34" charset="-122"/>
                 <a:cs typeface="Arial" pitchFamily="34" charset="-120"/>
               </a:rPr>
-              <a:t>(анализ одиночного отказа):</a:t>
+              <a:t>среди 48 суточных одиночных отказов</a:t>
             </a:r>
             <a:endParaRPr lang="en-US" sz="1300" dirty="0"/>
           </a:p>
@@ -8085,50 +8029,10 @@
                 <a:ea typeface="Arial" pitchFamily="34" charset="-122"/>
                 <a:cs typeface="Arial" pitchFamily="34" charset="-120"/>
               </a:rPr>
-              <a:t>отказ снижает min доступность</a:t>
+              <a:t>(48/48 проверено, цель ≥90% выполнена)</a:t>
             </a:r>
             <a:endParaRPr lang="en-US" sz="1300" dirty="0"/>
           </a:p>
-          <a:p>
-            <a:pPr indent="0" marL="0">
-              <a:lnSpc>
-                <a:spcPts val="1600"/>
-              </a:lnSpc>
-              <a:buNone/>
-            </a:pPr>
-            <a:r>
-              <a:rPr lang="en-US" sz="1300" dirty="0">
-                <a:solidFill>
-                  <a:srgbClr val="F2F4FF"/>
-                </a:solidFill>
-                <a:latin typeface="Arial" pitchFamily="34" charset="0"/>
-                <a:ea typeface="Arial" pitchFamily="34" charset="-122"/>
-                <a:cs typeface="Arial" pitchFamily="34" charset="-120"/>
-              </a:rPr>
-              <a:t>на 2,36 п.п., 45 клиент-отсчетов</a:t>
-            </a:r>
-            <a:endParaRPr lang="en-US" sz="1300" dirty="0"/>
-          </a:p>
-          <a:p>
-            <a:pPr indent="0" marL="0">
-              <a:lnSpc>
-                <a:spcPts val="1600"/>
-              </a:lnSpc>
-              <a:buNone/>
-            </a:pPr>
-            <a:r>
-              <a:rPr lang="en-US" sz="1300" dirty="0">
-                <a:solidFill>
-                  <a:srgbClr val="F2F4FF"/>
-                </a:solidFill>
-                <a:latin typeface="Arial" pitchFamily="34" charset="0"/>
-                <a:ea typeface="Arial" pitchFamily="34" charset="-122"/>
-                <a:cs typeface="Arial" pitchFamily="34" charset="-120"/>
-              </a:rPr>
-              <a:t>теряют маршрут</a:t>
-            </a:r>
-            <a:endParaRPr lang="en-US" sz="1300" dirty="0"/>
-          </a:p>
         </p:txBody>
       </p:sp>
       <p:sp>
@@ -8140,23 +8044,23 @@
         <p:spPr>
           <a:xfrm>
             <a:off x="640080" y="5029200"/>
-            <a:ext cx="3657600" cy="1097280"/>
-          </a:xfrm>
-          <a:prstGeom prst="rect">
-            <a:avLst/>
-          </a:prstGeom>
-          <a:noFill/>
-          <a:ln/>
-        </p:spPr>
-        <p:txBody>
-          <a:bodyPr wrap="square" lIns="0" tIns="0" rIns="0" bIns="0" rtlCol="0" anchor="ctr"/>
-          <a:lstStyle/>
-          <a:p>
-            <a:pPr indent="0" marL="0">
-              <a:buNone/>
-            </a:pPr>
-            <a:r>
-              <a:rPr lang="en-US" sz="1300" dirty="0">
+            <a:ext cx="3657600" cy="1188720"/>
+          </a:xfrm>
+          <a:prstGeom prst="rect">
+            <a:avLst/>
+          </a:prstGeom>
+          <a:noFill/>
+          <a:ln/>
+        </p:spPr>
+        <p:txBody>
+          <a:bodyPr wrap="square" lIns="0" tIns="0" rIns="0" bIns="0" rtlCol="0" anchor="ctr"/>
+          <a:lstStyle/>
+          <a:p>
+            <a:pPr indent="0" marL="0">
+              <a:buNone/>
+            </a:pPr>
+            <a:r>
+              <a:rPr lang="en-US" sz="1200" dirty="0">
                 <a:solidFill>
                   <a:srgbClr val="9AA3C7"/>
                 </a:solidFill>
@@ -8164,16 +8068,16 @@
                 <a:ea typeface="Arial" pitchFamily="34" charset="-122"/>
                 <a:cs typeface="Arial" pitchFamily="34" charset="-120"/>
               </a:rPr>
-              <a:t>Самый загруженный — S45 (83 пары</a:t>
-            </a:r>
-            <a:endParaRPr lang="en-US" sz="1300" dirty="0"/>
-          </a:p>
-          <a:p>
-            <a:pPr indent="0" marL="0">
-              <a:buNone/>
-            </a:pPr>
-            <a:r>
-              <a:rPr lang="en-US" sz="1300" dirty="0">
+              <a:t>Худший случай — S44 (№1 ранжирования критичности): </a:t>
+            </a:r>
+            <a:endParaRPr lang="en-US" sz="1200" dirty="0"/>
+          </a:p>
+          <a:p>
+            <a:pPr indent="0" marL="0">
+              <a:buNone/>
+            </a:pPr>
+            <a:r>
+              <a:rPr lang="en-US" sz="1200" dirty="0">
                 <a:solidFill>
                   <a:srgbClr val="9AA3C7"/>
                 </a:solidFill>
@@ -8181,54 +8085,15 @@
                 <a:ea typeface="Arial" pitchFamily="34" charset="-122"/>
                 <a:cs typeface="Arial" pitchFamily="34" charset="-120"/>
               </a:rPr>
-              <a:t>«момент × пункт») — при этом</a:t>
-            </a:r>
-            <a:endParaRPr lang="en-US" sz="1300" dirty="0"/>
-          </a:p>
-          <a:p>
-            <a:pPr indent="0" marL="0">
-              <a:buNone/>
-            </a:pPr>
-            <a:r>
-              <a:rPr lang="en-US" sz="1300" dirty="0">
-                <a:solidFill>
-                  <a:srgbClr val="9AA3C7"/>
-                </a:solidFill>
-                <a:latin typeface="Arial" pitchFamily="34" charset="0"/>
-                <a:ea typeface="Arial" pitchFamily="34" charset="-122"/>
-                <a:cs typeface="Arial" pitchFamily="34" charset="-120"/>
-              </a:rPr>
-              <a:t>не самый критичный.</a:t>
-            </a:r>
-            <a:endParaRPr lang="en-US" sz="1300" dirty="0"/>
-          </a:p>
-        </p:txBody>
-      </p:sp>
-      <p:sp>
-        <p:nvSpPr>
-          <p:cNvPr id="7" name="Shape 5"/>
-          <p:cNvSpPr/>
-          <p:nvPr/>
-        </p:nvSpPr>
-        <p:spPr>
-          <a:xfrm>
-            <a:off x="4709160" y="2377440"/>
-            <a:ext cx="6949440" cy="3977640"/>
-          </a:xfrm>
-          <a:prstGeom prst="roundRect">
-            <a:avLst>
-              <a:gd name="adj" fmla="val 1609"/>
-            </a:avLst>
-          </a:prstGeom>
-          <a:solidFill>
-            <a:srgbClr val="1B2240"/>
-          </a:solidFill>
-          <a:ln/>
-        </p:spPr>
-      </p:sp>
-      <p:sp>
-        <p:nvSpPr>
-          <p:cNvPr id="8" name="Text 6"/>
+              <a:t>−2,36 п.п. минимальной доступности, 45 клиент-отсчетов теряют маршрут. Самый загруженный (S45) — не самый критичный.</a:t>
+            </a:r>
+            <a:endParaRPr lang="en-US" sz="1200" dirty="0"/>
+          </a:p>
+        </p:txBody>
+      </p:sp>
+      <p:sp>
+        <p:nvSpPr>
+          <p:cNvPr id="7" name="Text 5"/>
           <p:cNvSpPr/>
           <p:nvPr/>
         </p:nvSpPr>
@@ -8267,7 +8132,7 @@
       </p:sp>
       <p:sp>
         <p:nvSpPr>
-          <p:cNvPr id="9" name="Shape 7"/>
+          <p:cNvPr id="8" name="Shape 6"/>
           <p:cNvSpPr/>
           <p:nvPr/>
         </p:nvSpPr>
@@ -8287,7 +8152,7 @@
       </p:sp>
       <p:sp>
         <p:nvSpPr>
-          <p:cNvPr id="10" name="Text 8"/>
+          <p:cNvPr id="9" name="Text 7"/>
           <p:cNvSpPr/>
           <p:nvPr/>
         </p:nvSpPr>
@@ -8326,7 +8191,7 @@
       </p:sp>
       <p:sp>
         <p:nvSpPr>
-          <p:cNvPr id="11" name="Text 9"/>
+          <p:cNvPr id="10" name="Text 8"/>
           <p:cNvSpPr/>
           <p:nvPr/>
         </p:nvSpPr>
@@ -8365,7 +8230,7 @@
       </p:sp>
       <p:sp>
         <p:nvSpPr>
-          <p:cNvPr id="12" name="Shape 10"/>
+          <p:cNvPr id="11" name="Shape 9"/>
           <p:cNvSpPr/>
           <p:nvPr/>
         </p:nvSpPr>
@@ -8385,7 +8250,7 @@
       </p:sp>
       <p:sp>
         <p:nvSpPr>
-          <p:cNvPr id="13" name="Text 11"/>
+          <p:cNvPr id="12" name="Text 10"/>
           <p:cNvSpPr/>
           <p:nvPr/>
         </p:nvSpPr>
@@ -8424,7 +8289,7 @@
       </p:sp>
       <p:sp>
         <p:nvSpPr>
-          <p:cNvPr id="14" name="Text 12"/>
+          <p:cNvPr id="13" name="Text 11"/>
           <p:cNvSpPr/>
           <p:nvPr/>
         </p:nvSpPr>
@@ -8463,7 +8328,7 @@
       </p:sp>
       <p:sp>
         <p:nvSpPr>
-          <p:cNvPr id="15" name="Shape 13"/>
+          <p:cNvPr id="14" name="Shape 12"/>
           <p:cNvSpPr/>
           <p:nvPr/>
         </p:nvSpPr>
@@ -8483,7 +8348,7 @@
       </p:sp>
       <p:sp>
         <p:nvSpPr>
-          <p:cNvPr id="16" name="Text 14"/>
+          <p:cNvPr id="15" name="Text 13"/>
           <p:cNvSpPr/>
           <p:nvPr/>
         </p:nvSpPr>
@@ -8514,7 +8379,7 @@
                 <a:ea typeface="Arial" pitchFamily="34" charset="-122"/>
                 <a:cs typeface="Arial" pitchFamily="34" charset="-120"/>
               </a:rPr>
-              <a:t>Leave-one-out за один проход</a:t>
+              <a:t>48 N-1 прогонов на общей геометрии</a:t>
             </a:r>
             <a:endParaRPr lang="en-US" sz="1400" dirty="0"/>
           </a:p>
@@ -8522,7 +8387,7 @@
       </p:sp>
       <p:sp>
         <p:nvSpPr>
-          <p:cNvPr id="17" name="Text 15"/>
+          <p:cNvPr id="16" name="Text 14"/>
           <p:cNvSpPr/>
           <p:nvPr/>
         </p:nvSpPr>
@@ -8553,7 +8418,7 @@
                 <a:ea typeface="Arial" pitchFamily="34" charset="-122"/>
                 <a:cs typeface="Arial" pitchFamily="34" charset="-120"/>
               </a:rPr>
-              <a:t>все 48 аппаратов проверены без пересчета орбит — секунды</a:t>
+              <a:t>координаты и базовые контакты переиспользуются, маршруты пересчитываются для каждого отказа</a:t>
             </a:r>
             <a:endParaRPr lang="en-US" sz="1150" dirty="0"/>
           </a:p>
@@ -8561,7 +8426,7 @@
       </p:sp>
       <p:sp>
         <p:nvSpPr>
-          <p:cNvPr id="18" name="Shape 16"/>
+          <p:cNvPr id="17" name="Shape 15"/>
           <p:cNvSpPr/>
           <p:nvPr/>
         </p:nvSpPr>
@@ -8581,7 +8446,7 @@
       </p:sp>
       <p:sp>
         <p:nvSpPr>
-          <p:cNvPr id="19" name="Text 17"/>
+          <p:cNvPr id="18" name="Text 16"/>
           <p:cNvSpPr/>
           <p:nvPr/>
         </p:nvSpPr>
@@ -8620,7 +8485,7 @@
       </p:sp>
       <p:sp>
         <p:nvSpPr>
-          <p:cNvPr id="20" name="Text 18"/>
+          <p:cNvPr id="19" name="Text 17"/>
           <p:cNvSpPr/>
           <p:nvPr/>
         </p:nvSpPr>
@@ -8799,7 +8664,7 @@
               <a:buNone/>
             </a:pPr>
             <a:r>
-              <a:rPr lang="en-US" sz="4400" b="1" dirty="0">
+              <a:rPr lang="en-US" sz="3400" b="1" dirty="0">
                 <a:solidFill>
                   <a:srgbClr val="9BA3F5"/>
                 </a:solidFill>
@@ -8807,9 +8672,9 @@
                 <a:ea typeface="Arial" pitchFamily="34" charset="-122"/>
                 <a:cs typeface="Arial" pitchFamily="34" charset="-120"/>
               </a:rPr>
-              <a:t>+1,67 п.п.</a:t>
-            </a:r>
-            <a:endParaRPr lang="en-US" sz="4400" dirty="0"/>
+              <a:t>96,67→98,33%</a:t>
+            </a:r>
+            <a:endParaRPr lang="en-US" sz="3400" dirty="0"/>
           </a:p>
         </p:txBody>
       </p:sp>
@@ -8849,7 +8714,7 @@
                 <a:ea typeface="Arial" pitchFamily="34" charset="-122"/>
                 <a:cs typeface="Arial" pitchFamily="34" charset="-120"/>
               </a:rPr>
-              <a:t>минимальной доступности:</a:t>
+              <a:t>мин. доступность после</a:t>
             </a:r>
             <a:endParaRPr lang="en-US" sz="1300" dirty="0"/>
           </a:p>
@@ -8869,7 +8734,7 @@
                 <a:ea typeface="Arial" pitchFamily="34" charset="-122"/>
                 <a:cs typeface="Arial" pitchFamily="34" charset="-120"/>
               </a:rPr>
-              <a:t>фазирование, найденное</a:t>
+              <a:t>автоподбора RAAN/фазирования</a:t>
             </a:r>
             <a:endParaRPr lang="en-US" sz="1300" dirty="0"/>
           </a:p>
@@ -8889,7 +8754,7 @@
                 <a:ea typeface="Arial" pitchFamily="34" charset="-122"/>
                 <a:cs typeface="Arial" pitchFamily="34" charset="-120"/>
               </a:rPr>
-              <a:t>оптимизатором за 40 прогонов</a:t>
+              <a:t>(бюджет 40 прогонов)</a:t>
             </a:r>
             <a:endParaRPr lang="en-US" sz="1300" dirty="0"/>
           </a:p>
@@ -8928,7 +8793,7 @@
                 <a:ea typeface="Arial" pitchFamily="34" charset="-122"/>
                 <a:cs typeface="Arial" pitchFamily="34" charset="-120"/>
               </a:rPr>
-              <a:t>275 км</a:t>
+              <a:t>8→2 мин</a:t>
             </a:r>
             <a:endParaRPr lang="en-US" sz="4400" dirty="0"/>
           </a:p>
@@ -8970,7 +8835,7 @@
                 <a:ea typeface="Arial" pitchFamily="34" charset="-122"/>
                 <a:cs typeface="Arial" pitchFamily="34" charset="-120"/>
               </a:rPr>
-              <a:t>запаса в требовании</a:t>
+              <a:t>худший перерыв</a:t>
             </a:r>
             <a:endParaRPr lang="en-US" sz="1300" dirty="0"/>
           </a:p>
@@ -8990,10 +8855,71 @@
                 <a:ea typeface="Arial" pitchFamily="34" charset="-122"/>
                 <a:cs typeface="Arial" pitchFamily="34" charset="-120"/>
               </a:rPr>
-              <a:t>к дальности ISL:</a:t>
+              <a:t>после автоподбора</a:t>
             </a:r>
             <a:endParaRPr lang="en-US" sz="1300" dirty="0"/>
           </a:p>
+        </p:txBody>
+      </p:sp>
+      <p:sp>
+        <p:nvSpPr>
+          <p:cNvPr id="8" name="Text 6"/>
+          <p:cNvSpPr/>
+          <p:nvPr/>
+        </p:nvSpPr>
+        <p:spPr>
+          <a:xfrm>
+            <a:off x="8138160" y="2834640"/>
+            <a:ext cx="3566160" cy="914400"/>
+          </a:xfrm>
+          <a:prstGeom prst="rect">
+            <a:avLst/>
+          </a:prstGeom>
+          <a:noFill/>
+          <a:ln/>
+        </p:spPr>
+        <p:txBody>
+          <a:bodyPr wrap="square" lIns="0" tIns="0" rIns="0" bIns="0" rtlCol="0" anchor="ctr"/>
+          <a:lstStyle/>
+          <a:p>
+            <a:pPr indent="0" marL="0">
+              <a:buNone/>
+            </a:pPr>
+            <a:r>
+              <a:rPr lang="en-US" sz="4400" b="1" dirty="0">
+                <a:solidFill>
+                  <a:srgbClr val="F2F4FF"/>
+                </a:solidFill>
+                <a:latin typeface="Arial" pitchFamily="34" charset="0"/>
+                <a:ea typeface="Arial" pitchFamily="34" charset="-122"/>
+                <a:cs typeface="Arial" pitchFamily="34" charset="-120"/>
+              </a:rPr>
+              <a:t>48/48</a:t>
+            </a:r>
+            <a:endParaRPr lang="en-US" sz="4400" dirty="0"/>
+          </a:p>
+        </p:txBody>
+      </p:sp>
+      <p:sp>
+        <p:nvSpPr>
+          <p:cNvPr id="9" name="Text 7"/>
+          <p:cNvSpPr/>
+          <p:nvPr/>
+        </p:nvSpPr>
+        <p:spPr>
+          <a:xfrm>
+            <a:off x="8138160" y="3767328"/>
+            <a:ext cx="3566160" cy="777240"/>
+          </a:xfrm>
+          <a:prstGeom prst="rect">
+            <a:avLst/>
+          </a:prstGeom>
+          <a:noFill/>
+          <a:ln/>
+        </p:spPr>
+        <p:txBody>
+          <a:bodyPr wrap="square" lIns="0" tIns="0" rIns="0" bIns="0" rtlCol="0" anchor="ctr"/>
+          <a:lstStyle/>
           <a:p>
             <a:pPr indent="0" marL="0">
               <a:lnSpc>
@@ -9010,71 +8936,10 @@
                 <a:ea typeface="Arial" pitchFamily="34" charset="-122"/>
                 <a:cs typeface="Arial" pitchFamily="34" charset="-120"/>
               </a:rPr>
-              <a:t>порог 2725, штатно 3000</a:t>
+              <a:t>N-1: любой одиночный отказ</a:t>
             </a:r>
             <a:endParaRPr lang="en-US" sz="1300" dirty="0"/>
           </a:p>
-        </p:txBody>
-      </p:sp>
-      <p:sp>
-        <p:nvSpPr>
-          <p:cNvPr id="8" name="Text 6"/>
-          <p:cNvSpPr/>
-          <p:nvPr/>
-        </p:nvSpPr>
-        <p:spPr>
-          <a:xfrm>
-            <a:off x="8138160" y="2834640"/>
-            <a:ext cx="3566160" cy="914400"/>
-          </a:xfrm>
-          <a:prstGeom prst="rect">
-            <a:avLst/>
-          </a:prstGeom>
-          <a:noFill/>
-          <a:ln/>
-        </p:spPr>
-        <p:txBody>
-          <a:bodyPr wrap="square" lIns="0" tIns="0" rIns="0" bIns="0" rtlCol="0" anchor="ctr"/>
-          <a:lstStyle/>
-          <a:p>
-            <a:pPr indent="0" marL="0">
-              <a:buNone/>
-            </a:pPr>
-            <a:r>
-              <a:rPr lang="en-US" sz="4400" b="1" dirty="0">
-                <a:solidFill>
-                  <a:srgbClr val="F2F4FF"/>
-                </a:solidFill>
-                <a:latin typeface="Arial" pitchFamily="34" charset="0"/>
-                <a:ea typeface="Arial" pitchFamily="34" charset="-122"/>
-                <a:cs typeface="Arial" pitchFamily="34" charset="-120"/>
-              </a:rPr>
-              <a:t>133</a:t>
-            </a:r>
-            <a:endParaRPr lang="en-US" sz="4400" dirty="0"/>
-          </a:p>
-        </p:txBody>
-      </p:sp>
-      <p:sp>
-        <p:nvSpPr>
-          <p:cNvPr id="9" name="Text 7"/>
-          <p:cNvSpPr/>
-          <p:nvPr/>
-        </p:nvSpPr>
-        <p:spPr>
-          <a:xfrm>
-            <a:off x="8138160" y="3767328"/>
-            <a:ext cx="3566160" cy="777240"/>
-          </a:xfrm>
-          <a:prstGeom prst="rect">
-            <a:avLst/>
-          </a:prstGeom>
-          <a:noFill/>
-          <a:ln/>
-        </p:spPr>
-        <p:txBody>
-          <a:bodyPr wrap="square" lIns="0" tIns="0" rIns="0" bIns="0" rtlCol="0" anchor="ctr"/>
-          <a:lstStyle/>
           <a:p>
             <a:pPr indent="0" marL="0">
               <a:lnSpc>
@@ -9091,47 +8956,7 @@
                 <a:ea typeface="Arial" pitchFamily="34" charset="-122"/>
                 <a:cs typeface="Arial" pitchFamily="34" charset="-120"/>
               </a:rPr>
-              <a:t>автотеста: границы, маршруты,</a:t>
-            </a:r>
-            <a:endParaRPr lang="en-US" sz="1300" dirty="0"/>
-          </a:p>
-          <a:p>
-            <a:pPr indent="0" marL="0">
-              <a:lnSpc>
-                <a:spcPts val="1600"/>
-              </a:lnSpc>
-              <a:buNone/>
-            </a:pPr>
-            <a:r>
-              <a:rPr lang="en-US" sz="1300" dirty="0">
-                <a:solidFill>
-                  <a:srgbClr val="F2F4FF"/>
-                </a:solidFill>
-                <a:latin typeface="Arial" pitchFamily="34" charset="0"/>
-                <a:ea typeface="Arial" pitchFamily="34" charset="-122"/>
-                <a:cs typeface="Arial" pitchFamily="34" charset="-120"/>
-              </a:rPr>
-              <a:t>экспорт, интерфейс —</a:t>
-            </a:r>
-            <a:endParaRPr lang="en-US" sz="1300" dirty="0"/>
-          </a:p>
-          <a:p>
-            <a:pPr indent="0" marL="0">
-              <a:lnSpc>
-                <a:spcPts val="1600"/>
-              </a:lnSpc>
-              <a:buNone/>
-            </a:pPr>
-            <a:r>
-              <a:rPr lang="en-US" sz="1300" dirty="0">
-                <a:solidFill>
-                  <a:srgbClr val="F2F4FF"/>
-                </a:solidFill>
-                <a:latin typeface="Arial" pitchFamily="34" charset="0"/>
-                <a:ea typeface="Arial" pitchFamily="34" charset="-122"/>
-                <a:cs typeface="Arial" pitchFamily="34" charset="-120"/>
-              </a:rPr>
-              <a:t>все проходят</a:t>
+              <a:t>выше целевого уровня</a:t>
             </a:r>
             <a:endParaRPr lang="en-US" sz="1300" dirty="0"/>
           </a:p>
@@ -9241,7 +9066,46 @@
       </p:sp>
       <p:sp>
         <p:nvSpPr>
-          <p:cNvPr id="12" name="Shape 10"/>
+          <p:cNvPr id="12" name="Text 10"/>
+          <p:cNvSpPr/>
+          <p:nvPr/>
+        </p:nvSpPr>
+        <p:spPr>
+          <a:xfrm>
+            <a:off x="640080" y="5779008"/>
+            <a:ext cx="8503920" cy="274320"/>
+          </a:xfrm>
+          <a:prstGeom prst="rect">
+            <a:avLst/>
+          </a:prstGeom>
+          <a:noFill/>
+          <a:ln/>
+        </p:spPr>
+        <p:txBody>
+          <a:bodyPr wrap="square" lIns="0" tIns="0" rIns="0" bIns="0" rtlCol="0" anchor="ctr"/>
+          <a:lstStyle/>
+          <a:p>
+            <a:pPr indent="0" marL="0">
+              <a:buNone/>
+            </a:pPr>
+            <a:r>
+              <a:rPr lang="en-US" sz="1100" dirty="0">
+                <a:solidFill>
+                  <a:srgbClr val="9AA3C7"/>
+                </a:solidFill>
+                <a:latin typeface="Arial" pitchFamily="34" charset="0"/>
+                <a:ea typeface="Arial" pitchFamily="34" charset="-122"/>
+                <a:cs typeface="Arial" pitchFamily="34" charset="-120"/>
+              </a:rPr>
+              <a:t>Лучший найденный кандидат в пределах бюджета поиска; глобальный оптимум не заявляется.</a:t>
+            </a:r>
+            <a:endParaRPr lang="en-US" sz="1100" dirty="0"/>
+          </a:p>
+        </p:txBody>
+      </p:sp>
+      <p:sp>
+        <p:nvSpPr>
+          <p:cNvPr id="13" name="Shape 11"/>
           <p:cNvSpPr/>
           <p:nvPr/>
         </p:nvSpPr>
@@ -9263,7 +9127,7 @@
       </p:sp>
       <p:pic>
         <p:nvPicPr>
-          <p:cNvPr id="13" name="Image 0" descr="C:\Users\Administrator\Desktop\cosmohak\presentation\img\qr_service.png">    </p:cNvPr>
+          <p:cNvPr id="14" name="Image 0" descr="C:\Users\Administrator\Desktop\cosmohak\presentation\img\qr_service.png">    </p:cNvPr>
           <p:cNvPicPr>
             <a:picLocks noChangeAspect="1"/>
           </p:cNvPicPr>
@@ -9287,7 +9151,7 @@
       </p:pic>
       <p:sp>
         <p:nvSpPr>
-          <p:cNvPr id="14" name="Text 11"/>
+          <p:cNvPr id="15" name="Text 12"/>
           <p:cNvSpPr/>
           <p:nvPr/>
         </p:nvSpPr>
@@ -9326,7 +9190,7 @@
       </p:sp>
       <p:sp>
         <p:nvSpPr>
-          <p:cNvPr id="15" name="Text 12"/>
+          <p:cNvPr id="16" name="Text 13"/>
           <p:cNvSpPr/>
           <p:nvPr/>
         </p:nvSpPr>
@@ -9457,42 +9321,22 @@
           <a:p>
             <a:pPr indent="0" marL="0">
               <a:lnSpc>
-                <a:spcPts val="3540"/>
+                <a:spcPts val="3304"/>
               </a:lnSpc>
               <a:buNone/>
             </a:pPr>
             <a:r>
-              <a:rPr lang="en-US" sz="3000" b="1" dirty="0">
-                <a:solidFill>
-                  <a:srgbClr val="F2F4FF"/>
-                </a:solidFill>
-                <a:latin typeface="Arial" pitchFamily="34" charset="0"/>
-                <a:ea typeface="Arial" pitchFamily="34" charset="-122"/>
-                <a:cs typeface="Arial" pitchFamily="34" charset="-120"/>
-              </a:rPr>
-              <a:t>Кэш геометрии + фильтр состояния:</a:t>
-            </a:r>
-            <a:endParaRPr lang="en-US" sz="3000" dirty="0"/>
-          </a:p>
-          <a:p>
-            <a:pPr indent="0" marL="0">
-              <a:lnSpc>
-                <a:spcPts val="3540"/>
-              </a:lnSpc>
-              <a:buNone/>
-            </a:pPr>
-            <a:r>
-              <a:rPr lang="en-US" sz="3000" b="1" dirty="0">
-                <a:solidFill>
-                  <a:srgbClr val="F2F4FF"/>
-                </a:solidFill>
-                <a:latin typeface="Arial" pitchFamily="34" charset="0"/>
-                <a:ea typeface="Arial" pitchFamily="34" charset="-122"/>
-                <a:cs typeface="Arial" pitchFamily="34" charset="-120"/>
-              </a:rPr>
-              <a:t>пересчета орбит нет вообще</a:t>
-            </a:r>
-            <a:endParaRPr lang="en-US" sz="3000" dirty="0"/>
+              <a:rPr lang="en-US" sz="2800" b="1" dirty="0">
+                <a:solidFill>
+                  <a:srgbClr val="F2F4FF"/>
+                </a:solidFill>
+                <a:latin typeface="Arial" pitchFamily="34" charset="0"/>
+                <a:ea typeface="Arial" pitchFamily="34" charset="-122"/>
+                <a:cs typeface="Arial" pitchFamily="34" charset="-120"/>
+              </a:rPr>
+              <a:t>Кэш геометрии + фильтр состояния + 4 стратегии маршрутизации</a:t>
+            </a:r>
+            <a:endParaRPr lang="en-US" sz="2800" dirty="0"/>
           </a:p>
         </p:txBody>
       </p:sp>
@@ -9685,7 +9529,7 @@
                 <a:ea typeface="Arial" pitchFamily="34" charset="-122"/>
                 <a:cs typeface="Arial" pitchFamily="34" charset="-120"/>
               </a:rPr>
-              <a:t>Смена самой геометрии</a:t>
+              <a:t>0 невалидных маршрутов</a:t>
             </a:r>
             <a:endParaRPr lang="en-US" sz="1550" dirty="0"/>
           </a:p>
@@ -9724,6 +9568,162 @@
                 <a:ea typeface="Arial" pitchFamily="34" charset="-122"/>
                 <a:cs typeface="Arial" pitchFamily="34" charset="-120"/>
               </a:rPr>
+              <a:t>каждый построенный путь проверяется на допустимость ребер в свой момент времени</a:t>
+            </a:r>
+            <a:endParaRPr lang="en-US" sz="1200" dirty="0"/>
+          </a:p>
+        </p:txBody>
+      </p:sp>
+      <p:sp>
+        <p:nvSpPr>
+          <p:cNvPr id="10" name="Text 8"/>
+          <p:cNvSpPr/>
+          <p:nvPr/>
+        </p:nvSpPr>
+        <p:spPr>
+          <a:xfrm>
+            <a:off x="640080" y="5943600"/>
+            <a:ext cx="5120640" cy="365760"/>
+          </a:xfrm>
+          <a:prstGeom prst="rect">
+            <a:avLst/>
+          </a:prstGeom>
+          <a:noFill/>
+          <a:ln/>
+        </p:spPr>
+        <p:txBody>
+          <a:bodyPr wrap="square" lIns="0" tIns="0" rIns="0" bIns="0" rtlCol="0" anchor="ctr"/>
+          <a:lstStyle/>
+          <a:p>
+            <a:pPr indent="0" marL="0">
+              <a:buNone/>
+            </a:pPr>
+            <a:r>
+              <a:rPr lang="en-US" sz="1550" b="1" dirty="0">
+                <a:solidFill>
+                  <a:srgbClr val="9BA3F5"/>
+                </a:solidFill>
+                <a:latin typeface="Arial" pitchFamily="34" charset="0"/>
+                <a:ea typeface="Arial" pitchFamily="34" charset="-122"/>
+                <a:cs typeface="Arial" pitchFamily="34" charset="-120"/>
+              </a:rPr>
+              <a:t>A* = weighted</a:t>
+            </a:r>
+            <a:endParaRPr lang="en-US" sz="1550" dirty="0"/>
+          </a:p>
+        </p:txBody>
+      </p:sp>
+      <p:sp>
+        <p:nvSpPr>
+          <p:cNvPr id="11" name="Text 9"/>
+          <p:cNvSpPr/>
+          <p:nvPr/>
+        </p:nvSpPr>
+        <p:spPr>
+          <a:xfrm>
+            <a:off x="868680" y="6309360"/>
+            <a:ext cx="5120640" cy="548640"/>
+          </a:xfrm>
+          <a:prstGeom prst="rect">
+            <a:avLst/>
+          </a:prstGeom>
+          <a:noFill/>
+          <a:ln/>
+        </p:spPr>
+        <p:txBody>
+          <a:bodyPr wrap="square" lIns="0" tIns="0" rIns="0" bIns="0" rtlCol="0" anchor="ctr"/>
+          <a:lstStyle/>
+          <a:p>
+            <a:pPr indent="0" marL="0">
+              <a:buNone/>
+            </a:pPr>
+            <a:r>
+              <a:rPr lang="en-US" sz="1200" dirty="0">
+                <a:solidFill>
+                  <a:srgbClr val="C9CFFA"/>
+                </a:solidFill>
+                <a:latin typeface="Arial" pitchFamily="34" charset="0"/>
+                <a:ea typeface="Arial" pitchFamily="34" charset="-122"/>
+                <a:cs typeface="Arial" pitchFamily="34" charset="-120"/>
+              </a:rPr>
+              <a:t>8640/8640 маршрутов совпали на 4 официальных сценариях</a:t>
+            </a:r>
+            <a:endParaRPr lang="en-US" sz="1200" dirty="0"/>
+          </a:p>
+        </p:txBody>
+      </p:sp>
+      <p:sp>
+        <p:nvSpPr>
+          <p:cNvPr id="12" name="Text 10"/>
+          <p:cNvSpPr/>
+          <p:nvPr/>
+        </p:nvSpPr>
+        <p:spPr>
+          <a:xfrm>
+            <a:off x="640080" y="6858000"/>
+            <a:ext cx="5120640" cy="365760"/>
+          </a:xfrm>
+          <a:prstGeom prst="rect">
+            <a:avLst/>
+          </a:prstGeom>
+          <a:noFill/>
+          <a:ln/>
+        </p:spPr>
+        <p:txBody>
+          <a:bodyPr wrap="square" lIns="0" tIns="0" rIns="0" bIns="0" rtlCol="0" anchor="ctr"/>
+          <a:lstStyle/>
+          <a:p>
+            <a:pPr indent="0" marL="0">
+              <a:buNone/>
+            </a:pPr>
+            <a:r>
+              <a:rPr lang="en-US" sz="1550" b="1" dirty="0">
+                <a:solidFill>
+                  <a:srgbClr val="9BA3F5"/>
+                </a:solidFill>
+                <a:latin typeface="Arial" pitchFamily="34" charset="0"/>
+                <a:ea typeface="Arial" pitchFamily="34" charset="-122"/>
+                <a:cs typeface="Arial" pitchFamily="34" charset="-120"/>
+              </a:rPr>
+              <a:t>Смена самой геометрии</a:t>
+            </a:r>
+            <a:endParaRPr lang="en-US" sz="1550" dirty="0"/>
+          </a:p>
+        </p:txBody>
+      </p:sp>
+      <p:sp>
+        <p:nvSpPr>
+          <p:cNvPr id="13" name="Text 11"/>
+          <p:cNvSpPr/>
+          <p:nvPr/>
+        </p:nvSpPr>
+        <p:spPr>
+          <a:xfrm>
+            <a:off x="868680" y="7223760"/>
+            <a:ext cx="5120640" cy="548640"/>
+          </a:xfrm>
+          <a:prstGeom prst="rect">
+            <a:avLst/>
+          </a:prstGeom>
+          <a:noFill/>
+          <a:ln/>
+        </p:spPr>
+        <p:txBody>
+          <a:bodyPr wrap="square" lIns="0" tIns="0" rIns="0" bIns="0" rtlCol="0" anchor="ctr"/>
+          <a:lstStyle/>
+          <a:p>
+            <a:pPr indent="0" marL="0">
+              <a:buNone/>
+            </a:pPr>
+            <a:r>
+              <a:rPr lang="en-US" sz="1200" dirty="0">
+                <a:solidFill>
+                  <a:srgbClr val="C9CFFA"/>
+                </a:solidFill>
+                <a:latin typeface="Arial" pitchFamily="34" charset="0"/>
+                <a:ea typeface="Arial" pitchFamily="34" charset="-122"/>
+                <a:cs typeface="Arial" pitchFamily="34" charset="-120"/>
+              </a:rPr>
               <a:t>кэш признается непригодным и пересобирается — изменения параметров поддерживаются корректно</a:t>
             </a:r>
             <a:endParaRPr lang="en-US" sz="1200" dirty="0"/>
@@ -9732,7 +9732,7 @@
       </p:sp>
       <p:sp>
         <p:nvSpPr>
-          <p:cNvPr id="10" name="Shape 8"/>
+          <p:cNvPr id="14" name="Shape 12"/>
           <p:cNvSpPr/>
           <p:nvPr/>
         </p:nvSpPr>
@@ -9754,7 +9754,7 @@
       </p:sp>
       <p:sp>
         <p:nvSpPr>
-          <p:cNvPr id="11" name="Text 9"/>
+          <p:cNvPr id="15" name="Text 13"/>
           <p:cNvSpPr/>
           <p:nvPr/>
         </p:nvSpPr>
@@ -9785,7 +9785,7 @@
                 <a:ea typeface="Arial" pitchFamily="34" charset="-122"/>
                 <a:cs typeface="Arial" pitchFamily="34" charset="-120"/>
               </a:rPr>
-              <a:t>Сильная часть алгоритма</a:t>
+              <a:t>4 стратегии в интерфейсе</a:t>
             </a:r>
             <a:endParaRPr lang="en-US" sz="1550" dirty="0"/>
           </a:p>
@@ -9793,14 +9793,14 @@
       </p:sp>
       <p:sp>
         <p:nvSpPr>
-          <p:cNvPr id="12" name="Text 10"/>
+          <p:cNvPr id="16" name="Text 14"/>
           <p:cNvSpPr/>
           <p:nvPr/>
         </p:nvSpPr>
         <p:spPr>
           <a:xfrm>
             <a:off x="6720840" y="3337560"/>
-            <a:ext cx="4617720" cy="2468880"/>
+            <a:ext cx="4617720" cy="2011680"/>
           </a:xfrm>
           <a:prstGeom prst="rect">
             <a:avLst/>
@@ -9828,7 +9828,7 @@
                 <a:ea typeface="Arial" pitchFamily="34" charset="-122"/>
                 <a:cs typeface="Arial" pitchFamily="34" charset="-120"/>
               </a:rPr>
-              <a:t>детерминированный поиск кратчайшего пути по суммарной длине линий</a:t>
+              <a:t>минимум длины — взвешенный поиск, по умолчанию</a:t>
             </a:r>
             <a:endParaRPr lang="en-US" sz="1250" dirty="0"/>
           </a:p>
@@ -9849,7 +9849,7 @@
                 <a:ea typeface="Arial" pitchFamily="34" charset="-122"/>
                 <a:cs typeface="Arial" pitchFamily="34" charset="-120"/>
               </a:rPr>
-              <a:t>tie-break на равенстве: одинаковый вход — одинаковый маршрут</a:t>
+              <a:t>A* с гео-эвристикой: тот же оптимум, раскрытий −93%</a:t>
             </a:r>
             <a:endParaRPr lang="en-US" sz="1250" dirty="0"/>
           </a:p>
@@ -9870,7 +9870,7 @@
                 <a:ea typeface="Arial" pitchFamily="34" charset="-122"/>
                 <a:cs typeface="Arial" pitchFamily="34" charset="-120"/>
               </a:rPr>
-              <a:t>0 невалидных маршрутов на всех сценариях</a:t>
+              <a:t>минимум переходов — BFS, baseline</a:t>
             </a:r>
             <a:endParaRPr lang="en-US" sz="1250" dirty="0"/>
           </a:p>
@@ -9891,36 +9891,54 @@
                 <a:ea typeface="Arial" pitchFamily="34" charset="-122"/>
                 <a:cs typeface="Arial" pitchFamily="34" charset="-120"/>
               </a:rPr>
-              <a:t>500/500 совпадений с независимой shortest-path реализацией</a:t>
+              <a:t>жадная географическая — быстро, без гарантии</a:t>
             </a:r>
             <a:endParaRPr lang="en-US" sz="1250" dirty="0"/>
           </a:p>
-          <a:p>
-            <a:pPr marL="152400" indent="-152400">
-              <a:spcAft>
-                <a:spcPts val="900"/>
-              </a:spcAft>
-              <a:buSzPct val="100000"/>
-              <a:buChar char="▸"/>
-            </a:pPr>
-            <a:r>
-              <a:rPr lang="en-US" sz="1250" dirty="0">
-                <a:solidFill>
-                  <a:srgbClr val="F2F4FF"/>
-                </a:solidFill>
-                <a:latin typeface="Arial" pitchFamily="34" charset="0"/>
-                <a:ea typeface="Arial" pitchFamily="34" charset="-122"/>
-                <a:cs typeface="Arial" pitchFamily="34" charset="-120"/>
-              </a:rPr>
-              <a:t>leave-one-out критичность 48 аппаратов — один проход, секунды</a:t>
-            </a:r>
-            <a:endParaRPr lang="en-US" sz="1250" dirty="0"/>
-          </a:p>
-        </p:txBody>
-      </p:sp>
-      <p:sp>
-        <p:nvSpPr>
-          <p:cNvPr id="13" name="Text 11"/>
+        </p:txBody>
+      </p:sp>
+      <p:sp>
+        <p:nvSpPr>
+          <p:cNvPr id="17" name="Text 15"/>
+          <p:cNvSpPr/>
+          <p:nvPr/>
+        </p:nvSpPr>
+        <p:spPr>
+          <a:xfrm>
+            <a:off x="6720840" y="5349240"/>
+            <a:ext cx="4617720" cy="548640"/>
+          </a:xfrm>
+          <a:prstGeom prst="rect">
+            <a:avLst/>
+          </a:prstGeom>
+          <a:noFill/>
+          <a:ln/>
+        </p:spPr>
+        <p:txBody>
+          <a:bodyPr wrap="square" lIns="0" tIns="0" rIns="0" bIns="0" rtlCol="0" anchor="ctr"/>
+          <a:lstStyle/>
+          <a:p>
+            <a:pPr indent="0" marL="0">
+              <a:buNone/>
+            </a:pPr>
+            <a:r>
+              <a:rPr lang="en-US" sz="1150" dirty="0">
+                <a:solidFill>
+                  <a:srgbClr val="C9CFFA"/>
+                </a:solidFill>
+                <a:latin typeface="Arial" pitchFamily="34" charset="0"/>
+                <a:ea typeface="Arial" pitchFamily="34" charset="-122"/>
+                <a:cs typeface="Arial" pitchFamily="34" charset="-120"/>
+              </a:rPr>
+              <a:t>замер на суточном прогоне: A* раскрыл 1766 узлов против 25920 у полного перебора</a:t>
+            </a:r>
+            <a:endParaRPr lang="en-US" sz="1150" dirty="0"/>
+          </a:p>
+        </p:txBody>
+      </p:sp>
+      <p:sp>
+        <p:nvSpPr>
+          <p:cNvPr id="18" name="Text 16"/>
           <p:cNvSpPr/>
           <p:nvPr/>
         </p:nvSpPr>
@@ -9951,7 +9969,7 @@
                 <a:ea typeface="Arial" pitchFamily="34" charset="-122"/>
                 <a:cs typeface="Arial" pitchFamily="34" charset="-120"/>
               </a:rPr>
-              <a:t>геометрия — официальный модуль организаторов; независимая реализация формул используется только для parity-проверки   ·   Команда kosmo-nizni_klodiki_148   ·   gitverse.ru/hackrus.experts/kosmo-nizni_klodiki_148</a:t>
+              <a:t>геометрия — официальный модуль организаторов; независимая реализация формул используется только для parity-проверки   ·   КосмоХакатон 2026 · команда Клодики   ·   gitverse.ru/hackrus.experts/kosmo-nizni_klodiki_148</a:t>
             </a:r>
             <a:endParaRPr lang="en-US" sz="1050" dirty="0"/>
           </a:p>
@@ -10568,7 +10586,7 @@
                 <a:ea typeface="Arial" pitchFamily="34" charset="-122"/>
                 <a:cs typeface="Arial" pitchFamily="34" charset="-120"/>
               </a:rPr>
-              <a:t>Команда kosmo-nizni_klodiki_148   ·   gitverse.ru/hackrus.experts/kosmo-nizni_klodiki_148</a:t>
+              <a:t>КосмоХакатон 2026 · команда Клодики   ·   gitverse.ru/hackrus.experts/kosmo-nizni_klodiki_148</a:t>
             </a:r>
             <a:endParaRPr lang="en-US" sz="1050" dirty="0"/>
           </a:p>
